--- a/presentations/competition-2026/submission-20261023/一球兩面_參賽提案_32頁_20261023.pptx
+++ b/presentations/competition-2026/submission-20261023/一球兩面_參賽提案_32頁_20261023.pptx
@@ -1,44 +1,44 @@
 
 <file path=ppt/presentation.xml><?xml version="1.0" encoding="utf-8"?>
-<p:presentation xmlns:a="http://schemas.openxmlformats.org/drawingml/2006/main" xmlns:p="http://schemas.openxmlformats.org/presentationml/2006/main" xmlns:r="http://schemas.openxmlformats.org/officeDocument/2006/relationships" saveSubsetFonts="1" autoCompressPictures="0">
+<p:presentation xmlns:a="http://schemas.openxmlformats.org/drawingml/2006/main" xmlns:r="http://schemas.openxmlformats.org/officeDocument/2006/relationships" xmlns:p="http://schemas.openxmlformats.org/presentationml/2006/main" saveSubsetFonts="1" autoCompressPictures="0">
   <p:sldMasterIdLst>
     <p:sldMasterId id="2147483648" r:id="rId1"/>
   </p:sldMasterIdLst>
   <p:sldIdLst>
-    <p:sldId id="256" r:id="rId7"/>
-    <p:sldId id="257" r:id="rId8"/>
-    <p:sldId id="258" r:id="rId9"/>
-    <p:sldId id="259" r:id="rId10"/>
-    <p:sldId id="260" r:id="rId11"/>
-    <p:sldId id="261" r:id="rId12"/>
-    <p:sldId id="262" r:id="rId13"/>
-    <p:sldId id="263" r:id="rId14"/>
-    <p:sldId id="264" r:id="rId15"/>
-    <p:sldId id="265" r:id="rId16"/>
-    <p:sldId id="266" r:id="rId17"/>
-    <p:sldId id="267" r:id="rId18"/>
-    <p:sldId id="268" r:id="rId19"/>
-    <p:sldId id="269" r:id="rId20"/>
-    <p:sldId id="270" r:id="rId21"/>
-    <p:sldId id="271" r:id="rId22"/>
-    <p:sldId id="272" r:id="rId23"/>
-    <p:sldId id="273" r:id="rId24"/>
-    <p:sldId id="274" r:id="rId25"/>
-    <p:sldId id="275" r:id="rId26"/>
-    <p:sldId id="276" r:id="rId27"/>
-    <p:sldId id="277" r:id="rId28"/>
-    <p:sldId id="278" r:id="rId29"/>
-    <p:sldId id="279" r:id="rId30"/>
-    <p:sldId id="280" r:id="rId31"/>
-    <p:sldId id="281" r:id="rId32"/>
-    <p:sldId id="282" r:id="rId33"/>
-    <p:sldId id="283" r:id="rId34"/>
-    <p:sldId id="284" r:id="rId35"/>
-    <p:sldId id="285" r:id="rId36"/>
-    <p:sldId id="286" r:id="rId37"/>
-    <p:sldId id="287" r:id="rId38"/>
+    <p:sldId id="256" r:id="rId2"/>
+    <p:sldId id="257" r:id="rId3"/>
+    <p:sldId id="258" r:id="rId4"/>
+    <p:sldId id="259" r:id="rId5"/>
+    <p:sldId id="260" r:id="rId6"/>
+    <p:sldId id="261" r:id="rId7"/>
+    <p:sldId id="262" r:id="rId8"/>
+    <p:sldId id="263" r:id="rId9"/>
+    <p:sldId id="264" r:id="rId10"/>
+    <p:sldId id="265" r:id="rId11"/>
+    <p:sldId id="266" r:id="rId12"/>
+    <p:sldId id="267" r:id="rId13"/>
+    <p:sldId id="268" r:id="rId14"/>
+    <p:sldId id="269" r:id="rId15"/>
+    <p:sldId id="270" r:id="rId16"/>
+    <p:sldId id="271" r:id="rId17"/>
+    <p:sldId id="272" r:id="rId18"/>
+    <p:sldId id="273" r:id="rId19"/>
+    <p:sldId id="274" r:id="rId20"/>
+    <p:sldId id="275" r:id="rId21"/>
+    <p:sldId id="276" r:id="rId22"/>
+    <p:sldId id="277" r:id="rId23"/>
+    <p:sldId id="278" r:id="rId24"/>
+    <p:sldId id="279" r:id="rId25"/>
+    <p:sldId id="280" r:id="rId26"/>
+    <p:sldId id="281" r:id="rId27"/>
+    <p:sldId id="282" r:id="rId28"/>
+    <p:sldId id="283" r:id="rId29"/>
+    <p:sldId id="284" r:id="rId30"/>
+    <p:sldId id="285" r:id="rId31"/>
+    <p:sldId id="286" r:id="rId32"/>
+    <p:sldId id="287" r:id="rId33"/>
   </p:sldIdLst>
-  <p:sldSz cx="12192000" cy="6858000" type="screen16x9"/>
+  <p:sldSz cx="12192000" cy="6858000"/>
   <p:notesSz cx="6858000" cy="9144000"/>
   <p:defaultTextStyle>
     <a:defPPr>
@@ -49,7 +49,7 @@
       </a:defRPr>
     </a:defPPr>
     <a:lvl1pPr marL="0" algn="l" defTabSz="457200" rtl="0" eaLnBrk="1" latinLnBrk="0" hangingPunct="1">
-      <a:defRPr sz="1800" kern="1200" lang="zh-TW" altLang="en-US">
+      <a:defRPr lang="zh-TW" altLang="en-US" sz="1800" kern="1200">
         <a:solidFill>
           <a:schemeClr val="tx1"/>
         </a:solidFill>
@@ -59,7 +59,7 @@
       </a:defRPr>
     </a:lvl1pPr>
     <a:lvl2pPr marL="457200" algn="l" defTabSz="457200" rtl="0" eaLnBrk="1" latinLnBrk="0" hangingPunct="1">
-      <a:defRPr sz="1800" kern="1200" lang="zh-TW" altLang="en-US">
+      <a:defRPr lang="zh-TW" altLang="en-US" sz="1800" kern="1200">
         <a:solidFill>
           <a:schemeClr val="tx1"/>
         </a:solidFill>
@@ -69,7 +69,7 @@
       </a:defRPr>
     </a:lvl2pPr>
     <a:lvl3pPr marL="914400" algn="l" defTabSz="457200" rtl="0" eaLnBrk="1" latinLnBrk="0" hangingPunct="1">
-      <a:defRPr sz="1800" kern="1200" lang="zh-TW" altLang="en-US">
+      <a:defRPr lang="zh-TW" altLang="en-US" sz="1800" kern="1200">
         <a:solidFill>
           <a:schemeClr val="tx1"/>
         </a:solidFill>
@@ -79,7 +79,7 @@
       </a:defRPr>
     </a:lvl3pPr>
     <a:lvl4pPr marL="1371600" algn="l" defTabSz="457200" rtl="0" eaLnBrk="1" latinLnBrk="0" hangingPunct="1">
-      <a:defRPr sz="1800" kern="1200" lang="zh-TW" altLang="en-US">
+      <a:defRPr lang="zh-TW" altLang="en-US" sz="1800" kern="1200">
         <a:solidFill>
           <a:schemeClr val="tx1"/>
         </a:solidFill>
@@ -89,7 +89,7 @@
       </a:defRPr>
     </a:lvl4pPr>
     <a:lvl5pPr marL="1828800" algn="l" defTabSz="457200" rtl="0" eaLnBrk="1" latinLnBrk="0" hangingPunct="1">
-      <a:defRPr sz="1800" kern="1200" lang="zh-TW" altLang="en-US">
+      <a:defRPr lang="zh-TW" altLang="en-US" sz="1800" kern="1200">
         <a:solidFill>
           <a:schemeClr val="tx1"/>
         </a:solidFill>
@@ -99,7 +99,7 @@
       </a:defRPr>
     </a:lvl5pPr>
     <a:lvl6pPr marL="2286000" algn="l" defTabSz="457200" rtl="0" eaLnBrk="1" latinLnBrk="0" hangingPunct="1">
-      <a:defRPr sz="1800" kern="1200" lang="zh-TW" altLang="en-US">
+      <a:defRPr lang="zh-TW" altLang="en-US" sz="1800" kern="1200">
         <a:solidFill>
           <a:schemeClr val="tx1"/>
         </a:solidFill>
@@ -109,7 +109,7 @@
       </a:defRPr>
     </a:lvl6pPr>
     <a:lvl7pPr marL="2743200" algn="l" defTabSz="457200" rtl="0" eaLnBrk="1" latinLnBrk="0" hangingPunct="1">
-      <a:defRPr sz="1800" kern="1200" lang="zh-TW" altLang="en-US">
+      <a:defRPr lang="zh-TW" altLang="en-US" sz="1800" kern="1200">
         <a:solidFill>
           <a:schemeClr val="tx1"/>
         </a:solidFill>
@@ -119,7 +119,7 @@
       </a:defRPr>
     </a:lvl7pPr>
     <a:lvl8pPr marL="3200400" algn="l" defTabSz="457200" rtl="0" eaLnBrk="1" latinLnBrk="0" hangingPunct="1">
-      <a:defRPr sz="1800" kern="1200" lang="zh-TW" altLang="en-US">
+      <a:defRPr lang="zh-TW" altLang="en-US" sz="1800" kern="1200">
         <a:solidFill>
           <a:schemeClr val="tx1"/>
         </a:solidFill>
@@ -129,7 +129,7 @@
       </a:defRPr>
     </a:lvl8pPr>
     <a:lvl9pPr marL="3657600" algn="l" defTabSz="457200" rtl="0" eaLnBrk="1" latinLnBrk="0" hangingPunct="1">
-      <a:defRPr sz="1800" kern="1200" lang="zh-TW" altLang="en-US">
+      <a:defRPr lang="zh-TW" altLang="en-US" sz="1800" kern="1200">
         <a:solidFill>
           <a:schemeClr val="tx1"/>
         </a:solidFill>
@@ -139,11 +139,27 @@
       </a:defRPr>
     </a:lvl9pPr>
   </p:defaultTextStyle>
+  <p:extLst>
+    <p:ext uri="{EFAFB233-063F-42B5-8137-9DF3F51BA10A}">
+      <p15:sldGuideLst xmlns:p15="http://schemas.microsoft.com/office/powerpoint/2012/main">
+        <p15:guide id="1" orient="horz" pos="2160">
+          <p15:clr>
+            <a:srgbClr val="A4A3A4"/>
+          </p15:clr>
+        </p15:guide>
+        <p15:guide id="2" pos="2880">
+          <p15:clr>
+            <a:srgbClr val="A4A3A4"/>
+          </p15:clr>
+        </p15:guide>
+      </p15:sldGuideLst>
+    </p:ext>
+  </p:extLst>
 </p:presentation>
 </file>
 
-<file path=ppt/slideLayouts/slideLayout7.xml><?xml version="1.0" encoding="utf-8"?>
-<p:sldLayout xmlns:a="http://schemas.openxmlformats.org/drawingml/2006/main" xmlns:p="http://schemas.openxmlformats.org/presentationml/2006/main" type="blank" preserve="1">
+<file path=ppt/slideLayouts/slideLayout1.xml><?xml version="1.0" encoding="utf-8"?>
+<p:sldLayout xmlns:a="http://schemas.openxmlformats.org/drawingml/2006/main" xmlns:r="http://schemas.openxmlformats.org/officeDocument/2006/relationships" xmlns:p="http://schemas.openxmlformats.org/presentationml/2006/main" type="blank" preserve="1">
   <p:cSld name="baseball_competition_polished19 — Blank">
     <p:spTree>
       <p:nvGrpSpPr>
@@ -175,12 +191,12 @@
           <a:lstStyle/>
           <a:p>
             <a:fld id="{5BCAD085-E8A6-8845-BD4E-CB4CCA059FC4}" type="datetimeFigureOut">
-              <a:rPr lang="zh-TW" smtClean="0" altLang="en-US">
+              <a:rPr lang="zh-TW" altLang="en-US" smtClean="0">
                 <a:latin typeface="Times New Roman"/>
                 <a:ea typeface="標楷體"/>
                 <a:cs typeface="Times New Roman"/>
               </a:rPr>
-              <a:t>1/27/13</a:t>
+              <a:t>2026/10/23</a:t>
             </a:fld>
             <a:endParaRPr lang="zh-TW" altLang="en-US">
               <a:latin typeface="Times New Roman"/>
@@ -229,7 +245,7 @@
           <a:lstStyle/>
           <a:p>
             <a:fld id="{C1FF6DA9-008F-8B48-92A6-B652298478BF}" type="slidenum">
-              <a:rPr lang="zh-TW" smtClean="0" altLang="en-US">
+              <a:rPr lang="zh-TW" altLang="en-US" smtClean="0">
                 <a:latin typeface="Times New Roman"/>
                 <a:ea typeface="標楷體"/>
                 <a:cs typeface="Times New Roman"/>
@@ -253,7 +269,7 @@
 </file>
 
 <file path=ppt/slideMasters/slideMaster1.xml><?xml version="1.0" encoding="utf-8"?>
-<p:sldMaster xmlns:a="http://schemas.openxmlformats.org/drawingml/2006/main" xmlns:p="http://schemas.openxmlformats.org/presentationml/2006/main" xmlns:r="http://schemas.openxmlformats.org/officeDocument/2006/relationships">
+<p:sldMaster xmlns:a="http://schemas.openxmlformats.org/drawingml/2006/main" xmlns:r="http://schemas.openxmlformats.org/officeDocument/2006/relationships" xmlns:p="http://schemas.openxmlformats.org/presentationml/2006/main">
   <p:cSld name="baseball_competition_polished19 — Master">
     <p:bg>
       <p:bgRef idx="1001">
@@ -297,7 +313,7 @@
           <a:bodyPr vert="horz" lIns="91440" tIns="45720" rIns="91440" bIns="45720" rtlCol="0" anchor="ctr"/>
           <a:lstStyle>
             <a:lvl1pPr algn="l">
-              <a:defRPr sz="1200" lang="zh-TW" altLang="en-US">
+              <a:defRPr lang="zh-TW" altLang="en-US" sz="1200">
                 <a:solidFill>
                   <a:schemeClr val="tx1">
                     <a:tint val="75000"/>
@@ -311,12 +327,12 @@
           </a:lstStyle>
           <a:p>
             <a:fld id="{5BCAD085-E8A6-8845-BD4E-CB4CCA059FC4}" type="datetimeFigureOut">
-              <a:rPr lang="zh-TW" smtClean="0" altLang="en-US">
+              <a:rPr lang="zh-TW" altLang="en-US" smtClean="0">
                 <a:latin typeface="Times New Roman"/>
                 <a:ea typeface="標楷體"/>
                 <a:cs typeface="Times New Roman"/>
               </a:rPr>
-              <a:t>1/27/13</a:t>
+              <a:t>2026/10/23</a:t>
             </a:fld>
             <a:endParaRPr lang="zh-TW" altLang="en-US">
               <a:latin typeface="Times New Roman"/>
@@ -349,7 +365,7 @@
           <a:bodyPr vert="horz" lIns="91440" tIns="45720" rIns="91440" bIns="45720" rtlCol="0" anchor="ctr"/>
           <a:lstStyle>
             <a:lvl1pPr algn="ctr">
-              <a:defRPr sz="1200" lang="zh-TW" altLang="en-US">
+              <a:defRPr lang="zh-TW" altLang="en-US" sz="1200">
                 <a:solidFill>
                   <a:schemeClr val="tx1">
                     <a:tint val="75000"/>
@@ -393,7 +409,7 @@
           <a:bodyPr vert="horz" lIns="91440" tIns="45720" rIns="91440" bIns="45720" rtlCol="0" anchor="ctr"/>
           <a:lstStyle>
             <a:lvl1pPr algn="r">
-              <a:defRPr sz="1200" lang="zh-TW" altLang="en-US">
+              <a:defRPr lang="zh-TW" altLang="en-US" sz="1200">
                 <a:solidFill>
                   <a:schemeClr val="tx1">
                     <a:tint val="75000"/>
@@ -407,7 +423,7 @@
           </a:lstStyle>
           <a:p>
             <a:fld id="{C1FF6DA9-008F-8B48-92A6-B652298478BF}" type="slidenum">
-              <a:rPr lang="zh-TW" smtClean="0" altLang="en-US">
+              <a:rPr lang="zh-TW" altLang="en-US" smtClean="0">
                 <a:latin typeface="Times New Roman"/>
                 <a:ea typeface="標楷體"/>
                 <a:cs typeface="Times New Roman"/>
@@ -426,7 +442,7 @@
   </p:cSld>
   <p:clrMap bg1="lt1" tx1="dk1" bg2="lt2" tx2="dk2" accent1="accent1" accent2="accent2" accent3="accent3" accent4="accent4" accent5="accent5" accent6="accent6" hlink="hlink" folHlink="folHlink"/>
   <p:sldLayoutIdLst>
-    <p:sldLayoutId id="2147483655" r:id="rId7"/>
+    <p:sldLayoutId id="2147483655" r:id="rId1"/>
   </p:sldLayoutIdLst>
   <p:txStyles>
     <p:titleStyle>
@@ -435,7 +451,7 @@
           <a:spcPct val="0"/>
         </a:spcBef>
         <a:buNone/>
-        <a:defRPr sz="3300" kern="1200" lang="zh-TW" altLang="en-US">
+        <a:defRPr lang="zh-TW" altLang="en-US" sz="3300" kern="1200">
           <a:solidFill>
             <a:schemeClr val="tx1"/>
           </a:solidFill>
@@ -452,7 +468,7 @@
         </a:spcBef>
         <a:buFont typeface="Arial"/>
         <a:buChar char="•"/>
-        <a:defRPr sz="2100" kern="1200" lang="zh-TW" altLang="en-US">
+        <a:defRPr lang="zh-TW" altLang="en-US" sz="2100" kern="1200">
           <a:solidFill>
             <a:schemeClr val="tx1"/>
           </a:solidFill>
@@ -467,7 +483,7 @@
         </a:spcBef>
         <a:buFont typeface="Arial"/>
         <a:buChar char="–"/>
-        <a:defRPr sz="1950" kern="1200" lang="zh-TW" altLang="en-US">
+        <a:defRPr lang="zh-TW" altLang="en-US" sz="1950" kern="1200">
           <a:solidFill>
             <a:schemeClr val="tx1"/>
           </a:solidFill>
@@ -482,7 +498,7 @@
         </a:spcBef>
         <a:buFont typeface="Arial"/>
         <a:buChar char="•"/>
-        <a:defRPr sz="1850" kern="1200" lang="zh-TW" altLang="en-US">
+        <a:defRPr lang="zh-TW" altLang="en-US" sz="1850" kern="1200">
           <a:solidFill>
             <a:schemeClr val="tx1"/>
           </a:solidFill>
@@ -497,7 +513,7 @@
         </a:spcBef>
         <a:buFont typeface="Arial"/>
         <a:buChar char="–"/>
-        <a:defRPr sz="1700" kern="1200" lang="zh-TW" altLang="en-US">
+        <a:defRPr lang="zh-TW" altLang="en-US" sz="1700" kern="1200">
           <a:solidFill>
             <a:schemeClr val="tx1"/>
           </a:solidFill>
@@ -512,7 +528,7 @@
         </a:spcBef>
         <a:buFont typeface="Arial"/>
         <a:buChar char="»"/>
-        <a:defRPr sz="1600" kern="1200" lang="zh-TW" altLang="en-US">
+        <a:defRPr lang="zh-TW" altLang="en-US" sz="1600" kern="1200">
           <a:solidFill>
             <a:schemeClr val="tx1"/>
           </a:solidFill>
@@ -527,7 +543,7 @@
         </a:spcBef>
         <a:buFont typeface="Arial"/>
         <a:buChar char="•"/>
-        <a:defRPr sz="1450" kern="1200" lang="zh-TW" altLang="en-US">
+        <a:defRPr lang="zh-TW" altLang="en-US" sz="1450" kern="1200">
           <a:solidFill>
             <a:schemeClr val="tx1"/>
           </a:solidFill>
@@ -542,7 +558,7 @@
         </a:spcBef>
         <a:buFont typeface="Arial"/>
         <a:buChar char="•"/>
-        <a:defRPr sz="1300" kern="1200" lang="zh-TW" altLang="en-US">
+        <a:defRPr lang="zh-TW" altLang="en-US" sz="1300" kern="1200">
           <a:solidFill>
             <a:schemeClr val="tx1"/>
           </a:solidFill>
@@ -557,7 +573,7 @@
         </a:spcBef>
         <a:buFont typeface="Arial"/>
         <a:buChar char="•"/>
-        <a:defRPr sz="1200" kern="1200" lang="zh-TW" altLang="en-US">
+        <a:defRPr lang="zh-TW" altLang="en-US" sz="1200" kern="1200">
           <a:solidFill>
             <a:schemeClr val="tx1"/>
           </a:solidFill>
@@ -572,7 +588,7 @@
         </a:spcBef>
         <a:buFont typeface="Arial"/>
         <a:buChar char="•"/>
-        <a:defRPr sz="1050" kern="1200" lang="zh-TW" altLang="en-US">
+        <a:defRPr lang="zh-TW" altLang="en-US" sz="1050" kern="1200">
           <a:solidFill>
             <a:schemeClr val="tx1"/>
           </a:solidFill>
@@ -591,7 +607,7 @@
         </a:defRPr>
       </a:defPPr>
       <a:lvl1pPr marL="0" algn="l" defTabSz="457200" rtl="0" eaLnBrk="1" latinLnBrk="0" hangingPunct="1">
-        <a:defRPr sz="2100" kern="1200" lang="zh-TW" altLang="en-US">
+        <a:defRPr lang="zh-TW" altLang="en-US" sz="2100" kern="1200">
           <a:solidFill>
             <a:schemeClr val="tx1"/>
           </a:solidFill>
@@ -601,7 +617,7 @@
         </a:defRPr>
       </a:lvl1pPr>
       <a:lvl2pPr marL="457200" algn="l" defTabSz="457200" rtl="0" eaLnBrk="1" latinLnBrk="0" hangingPunct="1">
-        <a:defRPr sz="1950" kern="1200" lang="zh-TW" altLang="en-US">
+        <a:defRPr lang="zh-TW" altLang="en-US" sz="1950" kern="1200">
           <a:solidFill>
             <a:schemeClr val="tx1"/>
           </a:solidFill>
@@ -611,7 +627,7 @@
         </a:defRPr>
       </a:lvl2pPr>
       <a:lvl3pPr marL="914400" algn="l" defTabSz="457200" rtl="0" eaLnBrk="1" latinLnBrk="0" hangingPunct="1">
-        <a:defRPr sz="1850" kern="1200" lang="zh-TW" altLang="en-US">
+        <a:defRPr lang="zh-TW" altLang="en-US" sz="1850" kern="1200">
           <a:solidFill>
             <a:schemeClr val="tx1"/>
           </a:solidFill>
@@ -621,7 +637,7 @@
         </a:defRPr>
       </a:lvl3pPr>
       <a:lvl4pPr marL="1371600" algn="l" defTabSz="457200" rtl="0" eaLnBrk="1" latinLnBrk="0" hangingPunct="1">
-        <a:defRPr sz="1700" kern="1200" lang="zh-TW" altLang="en-US">
+        <a:defRPr lang="zh-TW" altLang="en-US" sz="1700" kern="1200">
           <a:solidFill>
             <a:schemeClr val="tx1"/>
           </a:solidFill>
@@ -631,7 +647,7 @@
         </a:defRPr>
       </a:lvl4pPr>
       <a:lvl5pPr marL="1828800" algn="l" defTabSz="457200" rtl="0" eaLnBrk="1" latinLnBrk="0" hangingPunct="1">
-        <a:defRPr sz="1600" kern="1200" lang="zh-TW" altLang="en-US">
+        <a:defRPr lang="zh-TW" altLang="en-US" sz="1600" kern="1200">
           <a:solidFill>
             <a:schemeClr val="tx1"/>
           </a:solidFill>
@@ -641,7 +657,7 @@
         </a:defRPr>
       </a:lvl5pPr>
       <a:lvl6pPr marL="2286000" algn="l" defTabSz="457200" rtl="0" eaLnBrk="1" latinLnBrk="0" hangingPunct="1">
-        <a:defRPr sz="1450" kern="1200" lang="zh-TW" altLang="en-US">
+        <a:defRPr lang="zh-TW" altLang="en-US" sz="1450" kern="1200">
           <a:solidFill>
             <a:schemeClr val="tx1"/>
           </a:solidFill>
@@ -651,7 +667,7 @@
         </a:defRPr>
       </a:lvl6pPr>
       <a:lvl7pPr marL="2743200" algn="l" defTabSz="457200" rtl="0" eaLnBrk="1" latinLnBrk="0" hangingPunct="1">
-        <a:defRPr sz="1300" kern="1200" lang="zh-TW" altLang="en-US">
+        <a:defRPr lang="zh-TW" altLang="en-US" sz="1300" kern="1200">
           <a:solidFill>
             <a:schemeClr val="tx1"/>
           </a:solidFill>
@@ -661,7 +677,7 @@
         </a:defRPr>
       </a:lvl7pPr>
       <a:lvl8pPr marL="3200400" algn="l" defTabSz="457200" rtl="0" eaLnBrk="1" latinLnBrk="0" hangingPunct="1">
-        <a:defRPr sz="1200" kern="1200" lang="zh-TW" altLang="en-US">
+        <a:defRPr lang="zh-TW" altLang="en-US" sz="1200" kern="1200">
           <a:solidFill>
             <a:schemeClr val="tx1"/>
           </a:solidFill>
@@ -671,7 +687,7 @@
         </a:defRPr>
       </a:lvl8pPr>
       <a:lvl9pPr marL="3657600" algn="l" defTabSz="457200" rtl="0" eaLnBrk="1" latinLnBrk="0" hangingPunct="1">
-        <a:defRPr sz="1050" kern="1200" lang="zh-TW" altLang="en-US">
+        <a:defRPr lang="zh-TW" altLang="en-US" sz="1050" kern="1200">
           <a:solidFill>
             <a:schemeClr val="tx1"/>
           </a:solidFill>
@@ -686,7 +702,7 @@
 </file>
 
 <file path=ppt/slides/slide1.xml><?xml version="1.0" encoding="utf-8"?>
-<p:sld xmlns:a="http://schemas.openxmlformats.org/drawingml/2006/main" xmlns:p="http://schemas.openxmlformats.org/presentationml/2006/main" xmlns:r="http://schemas.openxmlformats.org/officeDocument/2006/relationships">
+<p:sld xmlns:a="http://schemas.openxmlformats.org/drawingml/2006/main" xmlns:r="http://schemas.openxmlformats.org/officeDocument/2006/relationships" xmlns:p="http://schemas.openxmlformats.org/presentationml/2006/main">
   <p:cSld>
     <p:bg>
       <p:bgPr>
@@ -1173,6 +1189,36 @@
           </p:txBody>
         </p:sp>
       </p:grpSp>
+      <p:pic>
+        <p:nvPicPr>
+          <p:cNvPr id="15" name="圖片 14">
+            <a:extLst>
+              <a:ext uri="{FF2B5EF4-FFF2-40B4-BE49-F238E27FC236}">
+                <a16:creationId xmlns:a16="http://schemas.microsoft.com/office/drawing/2014/main" id="{C7EAC4C2-788F-7E06-BC8C-3F825E4C77DB}"/>
+              </a:ext>
+            </a:extLst>
+          </p:cNvPr>
+          <p:cNvPicPr>
+            <a:picLocks noChangeAspect="1"/>
+          </p:cNvPicPr>
+          <p:nvPr/>
+        </p:nvPicPr>
+        <p:blipFill>
+          <a:blip r:embed="rId5"/>
+          <a:stretch>
+            <a:fillRect/>
+          </a:stretch>
+        </p:blipFill>
+        <p:spPr>
+          <a:xfrm>
+            <a:off x="1555882" y="5188172"/>
+            <a:ext cx="1355720" cy="1355720"/>
+          </a:xfrm>
+          <a:prstGeom prst="rect">
+            <a:avLst/>
+          </a:prstGeom>
+        </p:spPr>
+      </p:pic>
     </p:spTree>
   </p:cSld>
   <p:clrMapOvr>
@@ -1182,7 +1228,7 @@
 </file>
 
 <file path=ppt/slides/slide10.xml><?xml version="1.0" encoding="utf-8"?>
-<p:sld xmlns:a="http://schemas.openxmlformats.org/drawingml/2006/main" xmlns:p="http://schemas.openxmlformats.org/presentationml/2006/main">
+<p:sld xmlns:a="http://schemas.openxmlformats.org/drawingml/2006/main" xmlns:r="http://schemas.openxmlformats.org/officeDocument/2006/relationships" xmlns:p="http://schemas.openxmlformats.org/presentationml/2006/main">
   <p:cSld>
     <p:bg>
       <p:bgPr>
@@ -2519,7 +2565,7 @@
 </file>
 
 <file path=ppt/slides/slide11.xml><?xml version="1.0" encoding="utf-8"?>
-<p:sld xmlns:a="http://schemas.openxmlformats.org/drawingml/2006/main" xmlns:p="http://schemas.openxmlformats.org/presentationml/2006/main">
+<p:sld xmlns:a="http://schemas.openxmlformats.org/drawingml/2006/main" xmlns:r="http://schemas.openxmlformats.org/officeDocument/2006/relationships" xmlns:p="http://schemas.openxmlformats.org/presentationml/2006/main">
   <p:cSld>
     <p:bg>
       <p:bgPr>
@@ -3520,7 +3566,7 @@
 </file>
 
 <file path=ppt/slides/slide12.xml><?xml version="1.0" encoding="utf-8"?>
-<p:sld xmlns:a="http://schemas.openxmlformats.org/drawingml/2006/main" xmlns:p="http://schemas.openxmlformats.org/presentationml/2006/main">
+<p:sld xmlns:a="http://schemas.openxmlformats.org/drawingml/2006/main" xmlns:r="http://schemas.openxmlformats.org/officeDocument/2006/relationships" xmlns:p="http://schemas.openxmlformats.org/presentationml/2006/main">
   <p:cSld>
     <p:bg>
       <p:bgPr>
@@ -4711,7 +4757,7 @@
 </file>
 
 <file path=ppt/slides/slide13.xml><?xml version="1.0" encoding="utf-8"?>
-<p:sld xmlns:a="http://schemas.openxmlformats.org/drawingml/2006/main" xmlns:p="http://schemas.openxmlformats.org/presentationml/2006/main">
+<p:sld xmlns:a="http://schemas.openxmlformats.org/drawingml/2006/main" xmlns:r="http://schemas.openxmlformats.org/officeDocument/2006/relationships" xmlns:p="http://schemas.openxmlformats.org/presentationml/2006/main">
   <p:cSld>
     <p:bg>
       <p:bgPr>
@@ -6147,7 +6193,7 @@
 </file>
 
 <file path=ppt/slides/slide14.xml><?xml version="1.0" encoding="utf-8"?>
-<p:sld xmlns:a="http://schemas.openxmlformats.org/drawingml/2006/main" xmlns:p="http://schemas.openxmlformats.org/presentationml/2006/main">
+<p:sld xmlns:a="http://schemas.openxmlformats.org/drawingml/2006/main" xmlns:r="http://schemas.openxmlformats.org/officeDocument/2006/relationships" xmlns:p="http://schemas.openxmlformats.org/presentationml/2006/main">
   <p:cSld>
     <p:bg>
       <p:bgPr>
@@ -7004,7 +7050,7 @@
 </file>
 
 <file path=ppt/slides/slide15.xml><?xml version="1.0" encoding="utf-8"?>
-<p:sld xmlns:a="http://schemas.openxmlformats.org/drawingml/2006/main" xmlns:p="http://schemas.openxmlformats.org/presentationml/2006/main" xmlns:r="http://schemas.openxmlformats.org/officeDocument/2006/relationships">
+<p:sld xmlns:a="http://schemas.openxmlformats.org/drawingml/2006/main" xmlns:r="http://schemas.openxmlformats.org/officeDocument/2006/relationships" xmlns:p="http://schemas.openxmlformats.org/presentationml/2006/main">
   <p:cSld>
     <p:bg>
       <p:bgPr>
@@ -7271,7 +7317,7 @@
 </file>
 
 <file path=ppt/slides/slide16.xml><?xml version="1.0" encoding="utf-8"?>
-<p:sld xmlns:a="http://schemas.openxmlformats.org/drawingml/2006/main" xmlns:p="http://schemas.openxmlformats.org/presentationml/2006/main" xmlns:r="http://schemas.openxmlformats.org/officeDocument/2006/relationships">
+<p:sld xmlns:a="http://schemas.openxmlformats.org/drawingml/2006/main" xmlns:r="http://schemas.openxmlformats.org/officeDocument/2006/relationships" xmlns:p="http://schemas.openxmlformats.org/presentationml/2006/main">
   <p:cSld>
     <p:bg>
       <p:bgPr>
@@ -7555,7 +7601,7 @@
             <p:nvPr/>
           </p:nvPicPr>
           <p:blipFill>
-            <a:blip r:embed="rId3"/>
+            <a:blip r:embed="rId2"/>
             <a:stretch>
               <a:fillRect/>
             </a:stretch>
@@ -7795,7 +7841,7 @@
 </file>
 
 <file path=ppt/slides/slide17.xml><?xml version="1.0" encoding="utf-8"?>
-<p:sld xmlns:a="http://schemas.openxmlformats.org/drawingml/2006/main" xmlns:p="http://schemas.openxmlformats.org/presentationml/2006/main" xmlns:r="http://schemas.openxmlformats.org/officeDocument/2006/relationships">
+<p:sld xmlns:a="http://schemas.openxmlformats.org/drawingml/2006/main" xmlns:r="http://schemas.openxmlformats.org/officeDocument/2006/relationships" xmlns:p="http://schemas.openxmlformats.org/presentationml/2006/main">
   <p:cSld>
     <p:bg>
       <p:bgPr>
@@ -8294,7 +8340,7 @@
 </file>
 
 <file path=ppt/slides/slide18.xml><?xml version="1.0" encoding="utf-8"?>
-<p:sld xmlns:a="http://schemas.openxmlformats.org/drawingml/2006/main" xmlns:p="http://schemas.openxmlformats.org/presentationml/2006/main" xmlns:r="http://schemas.openxmlformats.org/officeDocument/2006/relationships">
+<p:sld xmlns:a="http://schemas.openxmlformats.org/drawingml/2006/main" xmlns:r="http://schemas.openxmlformats.org/officeDocument/2006/relationships" xmlns:p="http://schemas.openxmlformats.org/presentationml/2006/main">
   <p:cSld>
     <p:bg>
       <p:bgPr>
@@ -8762,7 +8808,7 @@
 </file>
 
 <file path=ppt/slides/slide19.xml><?xml version="1.0" encoding="utf-8"?>
-<p:sld xmlns:a="http://schemas.openxmlformats.org/drawingml/2006/main" xmlns:p="http://schemas.openxmlformats.org/presentationml/2006/main" xmlns:r="http://schemas.openxmlformats.org/officeDocument/2006/relationships">
+<p:sld xmlns:a="http://schemas.openxmlformats.org/drawingml/2006/main" xmlns:r="http://schemas.openxmlformats.org/officeDocument/2006/relationships" xmlns:p="http://schemas.openxmlformats.org/presentationml/2006/main">
   <p:cSld>
     <p:bg>
       <p:bgPr>
@@ -9326,7 +9372,7 @@
 </file>
 
 <file path=ppt/slides/slide2.xml><?xml version="1.0" encoding="utf-8"?>
-<p:sld xmlns:a="http://schemas.openxmlformats.org/drawingml/2006/main" xmlns:p="http://schemas.openxmlformats.org/presentationml/2006/main">
+<p:sld xmlns:a="http://schemas.openxmlformats.org/drawingml/2006/main" xmlns:r="http://schemas.openxmlformats.org/officeDocument/2006/relationships" xmlns:p="http://schemas.openxmlformats.org/presentationml/2006/main">
   <p:cSld>
     <p:bg>
       <p:bgPr>
@@ -10316,7 +10362,7 @@
 </file>
 
 <file path=ppt/slides/slide20.xml><?xml version="1.0" encoding="utf-8"?>
-<p:sld xmlns:a="http://schemas.openxmlformats.org/drawingml/2006/main" xmlns:p="http://schemas.openxmlformats.org/presentationml/2006/main">
+<p:sld xmlns:a="http://schemas.openxmlformats.org/drawingml/2006/main" xmlns:r="http://schemas.openxmlformats.org/officeDocument/2006/relationships" xmlns:p="http://schemas.openxmlformats.org/presentationml/2006/main">
   <p:cSld>
     <p:bg>
       <p:bgPr>
@@ -11452,7 +11498,7 @@
 </file>
 
 <file path=ppt/slides/slide21.xml><?xml version="1.0" encoding="utf-8"?>
-<p:sld xmlns:a="http://schemas.openxmlformats.org/drawingml/2006/main" xmlns:p="http://schemas.openxmlformats.org/presentationml/2006/main" xmlns:r="http://schemas.openxmlformats.org/officeDocument/2006/relationships">
+<p:sld xmlns:a="http://schemas.openxmlformats.org/drawingml/2006/main" xmlns:r="http://schemas.openxmlformats.org/officeDocument/2006/relationships" xmlns:p="http://schemas.openxmlformats.org/presentationml/2006/main">
   <p:cSld>
     <p:bg>
       <p:bgPr>
@@ -12387,7 +12433,7 @@
 </file>
 
 <file path=ppt/slides/slide22.xml><?xml version="1.0" encoding="utf-8"?>
-<p:sld xmlns:a="http://schemas.openxmlformats.org/drawingml/2006/main" xmlns:p="http://schemas.openxmlformats.org/presentationml/2006/main" xmlns:r="http://schemas.openxmlformats.org/officeDocument/2006/relationships">
+<p:sld xmlns:a="http://schemas.openxmlformats.org/drawingml/2006/main" xmlns:r="http://schemas.openxmlformats.org/officeDocument/2006/relationships" xmlns:p="http://schemas.openxmlformats.org/presentationml/2006/main">
   <p:cSld>
     <p:bg>
       <p:bgPr>
@@ -13001,7 +13047,7 @@
 </file>
 
 <file path=ppt/slides/slide23.xml><?xml version="1.0" encoding="utf-8"?>
-<p:sld xmlns:a="http://schemas.openxmlformats.org/drawingml/2006/main" xmlns:p="http://schemas.openxmlformats.org/presentationml/2006/main">
+<p:sld xmlns:a="http://schemas.openxmlformats.org/drawingml/2006/main" xmlns:r="http://schemas.openxmlformats.org/officeDocument/2006/relationships" xmlns:p="http://schemas.openxmlformats.org/presentationml/2006/main">
   <p:cSld>
     <p:bg>
       <p:bgPr>
@@ -14192,7 +14238,7 @@
 </file>
 
 <file path=ppt/slides/slide24.xml><?xml version="1.0" encoding="utf-8"?>
-<p:sld xmlns:a="http://schemas.openxmlformats.org/drawingml/2006/main" xmlns:p="http://schemas.openxmlformats.org/presentationml/2006/main" xmlns:r="http://schemas.openxmlformats.org/officeDocument/2006/relationships">
+<p:sld xmlns:a="http://schemas.openxmlformats.org/drawingml/2006/main" xmlns:r="http://schemas.openxmlformats.org/officeDocument/2006/relationships" xmlns:p="http://schemas.openxmlformats.org/presentationml/2006/main">
   <p:cSld>
     <p:bg>
       <p:bgPr>
@@ -14957,7 +15003,7 @@
 </file>
 
 <file path=ppt/slides/slide25.xml><?xml version="1.0" encoding="utf-8"?>
-<p:sld xmlns:a="http://schemas.openxmlformats.org/drawingml/2006/main" xmlns:p="http://schemas.openxmlformats.org/presentationml/2006/main" xmlns:r="http://schemas.openxmlformats.org/officeDocument/2006/relationships">
+<p:sld xmlns:a="http://schemas.openxmlformats.org/drawingml/2006/main" xmlns:r="http://schemas.openxmlformats.org/officeDocument/2006/relationships" xmlns:p="http://schemas.openxmlformats.org/presentationml/2006/main">
   <p:cSld>
     <p:bg>
       <p:bgPr>
@@ -15641,7 +15687,7 @@
 </file>
 
 <file path=ppt/slides/slide26.xml><?xml version="1.0" encoding="utf-8"?>
-<p:sld xmlns:a="http://schemas.openxmlformats.org/drawingml/2006/main" xmlns:p="http://schemas.openxmlformats.org/presentationml/2006/main" xmlns:p14="http://schemas.microsoft.com/office/powerpoint/2010/main" xmlns:r="http://schemas.openxmlformats.org/officeDocument/2006/relationships">
+<p:sld xmlns:a="http://schemas.openxmlformats.org/drawingml/2006/main" xmlns:r="http://schemas.openxmlformats.org/officeDocument/2006/relationships" xmlns:p="http://schemas.openxmlformats.org/presentationml/2006/main">
   <p:cSld>
     <p:bg>
       <p:bgPr>
@@ -15831,16 +15877,16 @@
             <a:picLocks noChangeAspect="1"/>
           </p:cNvPicPr>
           <p:nvPr>
-            <a:videoFile r:link="rId4"/>
+            <a:videoFile r:link="rId2"/>
             <p:extLst>
               <p:ext uri="{DAA4B4D4-6D71-4841-9C94-3DE7FCFB9230}">
-                <p14:media r:embed="rId3"/>
+                <p14:media xmlns:p14="http://schemas.microsoft.com/office/powerpoint/2010/main" r:embed="rId1"/>
               </p:ext>
             </p:extLst>
           </p:nvPr>
         </p:nvPicPr>
         <p:blipFill>
-          <a:blip r:embed="rId2"/>
+          <a:blip r:embed="rId4"/>
           <a:stretch>
             <a:fillRect/>
           </a:stretch>
@@ -15879,7 +15925,7 @@
 </file>
 
 <file path=ppt/slides/slide27.xml><?xml version="1.0" encoding="utf-8"?>
-<p:sld xmlns:a="http://schemas.openxmlformats.org/drawingml/2006/main" xmlns:p="http://schemas.openxmlformats.org/presentationml/2006/main" xmlns:r="http://schemas.openxmlformats.org/officeDocument/2006/relationships">
+<p:sld xmlns:a="http://schemas.openxmlformats.org/drawingml/2006/main" xmlns:r="http://schemas.openxmlformats.org/officeDocument/2006/relationships" xmlns:p="http://schemas.openxmlformats.org/presentationml/2006/main">
   <p:cSld>
     <p:bg>
       <p:bgPr>
@@ -16146,7 +16192,7 @@
 </file>
 
 <file path=ppt/slides/slide28.xml><?xml version="1.0" encoding="utf-8"?>
-<p:sld xmlns:a="http://schemas.openxmlformats.org/drawingml/2006/main" xmlns:p="http://schemas.openxmlformats.org/presentationml/2006/main">
+<p:sld xmlns:a="http://schemas.openxmlformats.org/drawingml/2006/main" xmlns:r="http://schemas.openxmlformats.org/officeDocument/2006/relationships" xmlns:p="http://schemas.openxmlformats.org/presentationml/2006/main">
   <p:cSld>
     <p:bg>
       <p:bgPr>
@@ -17010,7 +17056,7 @@
 </file>
 
 <file path=ppt/slides/slide29.xml><?xml version="1.0" encoding="utf-8"?>
-<p:sld xmlns:a="http://schemas.openxmlformats.org/drawingml/2006/main" xmlns:p="http://schemas.openxmlformats.org/presentationml/2006/main">
+<p:sld xmlns:a="http://schemas.openxmlformats.org/drawingml/2006/main" xmlns:r="http://schemas.openxmlformats.org/officeDocument/2006/relationships" xmlns:p="http://schemas.openxmlformats.org/presentationml/2006/main">
   <p:cSld>
     <p:bg>
       <p:bgPr>
@@ -17901,7 +17947,7 @@
 </file>
 
 <file path=ppt/slides/slide3.xml><?xml version="1.0" encoding="utf-8"?>
-<p:sld xmlns:a="http://schemas.openxmlformats.org/drawingml/2006/main" xmlns:p="http://schemas.openxmlformats.org/presentationml/2006/main" xmlns:r="http://schemas.openxmlformats.org/officeDocument/2006/relationships">
+<p:sld xmlns:a="http://schemas.openxmlformats.org/drawingml/2006/main" xmlns:r="http://schemas.openxmlformats.org/officeDocument/2006/relationships" xmlns:p="http://schemas.openxmlformats.org/presentationml/2006/main">
   <p:cSld>
     <p:bg>
       <p:bgPr>
@@ -18168,7 +18214,7 @@
 </file>
 
 <file path=ppt/slides/slide30.xml><?xml version="1.0" encoding="utf-8"?>
-<p:sld xmlns:a="http://schemas.openxmlformats.org/drawingml/2006/main" xmlns:p="http://schemas.openxmlformats.org/presentationml/2006/main">
+<p:sld xmlns:a="http://schemas.openxmlformats.org/drawingml/2006/main" xmlns:r="http://schemas.openxmlformats.org/officeDocument/2006/relationships" xmlns:p="http://schemas.openxmlformats.org/presentationml/2006/main">
   <p:cSld>
     <p:bg>
       <p:bgPr>
@@ -19439,7 +19485,7 @@
 </file>
 
 <file path=ppt/slides/slide31.xml><?xml version="1.0" encoding="utf-8"?>
-<p:sld xmlns:a="http://schemas.openxmlformats.org/drawingml/2006/main" xmlns:p="http://schemas.openxmlformats.org/presentationml/2006/main" xmlns:r="http://schemas.openxmlformats.org/officeDocument/2006/relationships">
+<p:sld xmlns:a="http://schemas.openxmlformats.org/drawingml/2006/main" xmlns:r="http://schemas.openxmlformats.org/officeDocument/2006/relationships" xmlns:p="http://schemas.openxmlformats.org/presentationml/2006/main">
   <p:cSld>
     <p:bg>
       <p:bgPr>
@@ -20228,7 +20274,7 @@
 </file>
 
 <file path=ppt/slides/slide32.xml><?xml version="1.0" encoding="utf-8"?>
-<p:sld xmlns:a="http://schemas.openxmlformats.org/drawingml/2006/main" xmlns:p="http://schemas.openxmlformats.org/presentationml/2006/main" xmlns:r="http://schemas.openxmlformats.org/officeDocument/2006/relationships">
+<p:sld xmlns:a="http://schemas.openxmlformats.org/drawingml/2006/main" xmlns:r="http://schemas.openxmlformats.org/officeDocument/2006/relationships" xmlns:p="http://schemas.openxmlformats.org/presentationml/2006/main">
   <p:cSld>
     <p:bg>
       <p:bgPr>
@@ -20605,6 +20651,36 @@
           </p:txBody>
         </p:sp>
       </p:grpSp>
+      <p:pic>
+        <p:nvPicPr>
+          <p:cNvPr id="7" name="圖片 6">
+            <a:extLst>
+              <a:ext uri="{FF2B5EF4-FFF2-40B4-BE49-F238E27FC236}">
+                <a16:creationId xmlns:a16="http://schemas.microsoft.com/office/drawing/2014/main" id="{27E10D67-1E64-BFA4-72DD-E54492EEB965}"/>
+              </a:ext>
+            </a:extLst>
+          </p:cNvPr>
+          <p:cNvPicPr>
+            <a:picLocks noChangeAspect="1"/>
+          </p:cNvPicPr>
+          <p:nvPr/>
+        </p:nvPicPr>
+        <p:blipFill>
+          <a:blip r:embed="rId5"/>
+          <a:stretch>
+            <a:fillRect/>
+          </a:stretch>
+        </p:blipFill>
+        <p:spPr>
+          <a:xfrm>
+            <a:off x="1555882" y="5188172"/>
+            <a:ext cx="1355720" cy="1355720"/>
+          </a:xfrm>
+          <a:prstGeom prst="rect">
+            <a:avLst/>
+          </a:prstGeom>
+        </p:spPr>
+      </p:pic>
     </p:spTree>
   </p:cSld>
   <p:clrMapOvr>
@@ -20614,7 +20690,7 @@
 </file>
 
 <file path=ppt/slides/slide4.xml><?xml version="1.0" encoding="utf-8"?>
-<p:sld xmlns:a="http://schemas.openxmlformats.org/drawingml/2006/main" xmlns:p="http://schemas.openxmlformats.org/presentationml/2006/main" xmlns:r="http://schemas.openxmlformats.org/officeDocument/2006/relationships">
+<p:sld xmlns:a="http://schemas.openxmlformats.org/drawingml/2006/main" xmlns:r="http://schemas.openxmlformats.org/officeDocument/2006/relationships" xmlns:p="http://schemas.openxmlformats.org/presentationml/2006/main">
   <p:cSld>
     <p:bg>
       <p:bgPr>
@@ -21417,7 +21493,7 @@
 </file>
 
 <file path=ppt/slides/slide5.xml><?xml version="1.0" encoding="utf-8"?>
-<p:sld xmlns:a="http://schemas.openxmlformats.org/drawingml/2006/main" xmlns:p="http://schemas.openxmlformats.org/presentationml/2006/main" xmlns:r="http://schemas.openxmlformats.org/officeDocument/2006/relationships">
+<p:sld xmlns:a="http://schemas.openxmlformats.org/drawingml/2006/main" xmlns:r="http://schemas.openxmlformats.org/officeDocument/2006/relationships" xmlns:p="http://schemas.openxmlformats.org/presentationml/2006/main">
   <p:cSld>
     <p:bg>
       <p:bgPr>
@@ -21621,7 +21697,7 @@
             <p:nvPr/>
           </p:nvPicPr>
           <p:blipFill>
-            <a:blip r:embed="rId4"/>
+            <a:blip r:embed="rId2"/>
             <a:stretch>
               <a:fillRect/>
             </a:stretch>
@@ -21780,7 +21856,7 @@
             <p:nvPr/>
           </p:nvPicPr>
           <p:blipFill>
-            <a:blip r:embed="rId5"/>
+            <a:blip r:embed="rId3"/>
             <a:stretch>
               <a:fillRect/>
             </a:stretch>
@@ -21946,7 +22022,7 @@
 </file>
 
 <file path=ppt/slides/slide6.xml><?xml version="1.0" encoding="utf-8"?>
-<p:sld xmlns:a="http://schemas.openxmlformats.org/drawingml/2006/main" xmlns:p="http://schemas.openxmlformats.org/presentationml/2006/main">
+<p:sld xmlns:a="http://schemas.openxmlformats.org/drawingml/2006/main" xmlns:r="http://schemas.openxmlformats.org/officeDocument/2006/relationships" xmlns:p="http://schemas.openxmlformats.org/presentationml/2006/main">
   <p:cSld>
     <p:bg>
       <p:bgPr>
@@ -22889,7 +22965,7 @@
 </file>
 
 <file path=ppt/slides/slide7.xml><?xml version="1.0" encoding="utf-8"?>
-<p:sld xmlns:a="http://schemas.openxmlformats.org/drawingml/2006/main" xmlns:p="http://schemas.openxmlformats.org/presentationml/2006/main" xmlns:r="http://schemas.openxmlformats.org/officeDocument/2006/relationships">
+<p:sld xmlns:a="http://schemas.openxmlformats.org/drawingml/2006/main" xmlns:r="http://schemas.openxmlformats.org/officeDocument/2006/relationships" xmlns:p="http://schemas.openxmlformats.org/presentationml/2006/main">
   <p:cSld>
     <p:bg>
       <p:bgPr>
@@ -23093,7 +23169,7 @@
             <p:nvPr/>
           </p:nvPicPr>
           <p:blipFill>
-            <a:blip r:embed="rId3"/>
+            <a:blip r:embed="rId2"/>
             <a:stretch>
               <a:fillRect/>
             </a:stretch>
@@ -23132,7 +23208,7 @@
             <p:nvPr/>
           </p:nvPicPr>
           <p:blipFill>
-            <a:blip r:embed="rId4"/>
+            <a:blip r:embed="rId3"/>
             <a:stretch>
               <a:fillRect/>
             </a:stretch>
@@ -23171,7 +23247,7 @@
             <p:nvPr/>
           </p:nvPicPr>
           <p:blipFill>
-            <a:blip r:embed="rId5"/>
+            <a:blip r:embed="rId4"/>
             <a:stretch>
               <a:fillRect/>
             </a:stretch>
@@ -23635,7 +23711,7 @@
 </file>
 
 <file path=ppt/slides/slide8.xml><?xml version="1.0" encoding="utf-8"?>
-<p:sld xmlns:a="http://schemas.openxmlformats.org/drawingml/2006/main" xmlns:p="http://schemas.openxmlformats.org/presentationml/2006/main" xmlns:r="http://schemas.openxmlformats.org/officeDocument/2006/relationships">
+<p:sld xmlns:a="http://schemas.openxmlformats.org/drawingml/2006/main" xmlns:r="http://schemas.openxmlformats.org/officeDocument/2006/relationships" xmlns:p="http://schemas.openxmlformats.org/presentationml/2006/main">
   <p:cSld>
     <p:bg>
       <p:bgPr>
@@ -23902,7 +23978,7 @@
 </file>
 
 <file path=ppt/slides/slide9.xml><?xml version="1.0" encoding="utf-8"?>
-<p:sld xmlns:a="http://schemas.openxmlformats.org/drawingml/2006/main" xmlns:p="http://schemas.openxmlformats.org/presentationml/2006/main">
+<p:sld xmlns:a="http://schemas.openxmlformats.org/drawingml/2006/main" xmlns:r="http://schemas.openxmlformats.org/officeDocument/2006/relationships" xmlns:p="http://schemas.openxmlformats.org/presentationml/2006/main">
   <p:cSld>
     <p:bg>
       <p:bgPr>
